--- a/Curriculo/Fase2_Basico1/decks/Basico1_S08_Kiran.pptx
+++ b/Curriculo/Fase2_Basico1/decks/Basico1_S08_Kiran.pptx
@@ -130,7 +130,7 @@
   <p:extLst>
     <p:ext uri="{521415D9-36F7-43E2-AB2F-B90AF26B5E84}">
       <p14:sectionLst xmlns:p14="http://schemas.microsoft.com/office/powerpoint/2010/main">
-        <p14:section name="Semana 8" id="{24D64459-4CD9-B817-37CD-E8542BCC2B0E}">
+        <p14:section name="Semana 8" id="{1B4E82AB-2ACD-E12D-08AF-A964983EB13F}">
           <p14:sldIdLst>
             <p14:sldId id="256"/>
             <p14:sldId id="257"/>
@@ -192,7 +192,7 @@
     </p:spTree>
     <p:extLst>
       <p:ext uri="{BB962C8B-B14F-4D97-AF65-F5344CB8AC3E}">
-        <p14:creationId xmlns:p14="http://schemas.microsoft.com/office/powerpoint/2010/main" val="2919576888"/>
+        <p14:creationId xmlns:p14="http://schemas.microsoft.com/office/powerpoint/2010/main" val="2525214514"/>
       </p:ext>
     </p:extLst>
   </p:cSld>
@@ -339,7 +339,6 @@
             <a:r>
               <a:rPr lang="en-US" dirty="0"/>
               <a:t>19:50: entra, reclama anfitrión, deja listas 7 salas automáticas (cuenta regresiva de 15 s), la planilla de rúbrica en el orden sorteado y el cronómetro. 20:00: graba desde el minuto 0 (Basico1-Martes_S08_2026-12-01 o Basico1-Jueves_S08_2026-12-03). Saluda con leve inclinación: 안녕하세요! y espera la respuesta, con cámaras encendidas.
-Imagen sugerida: Portada de Repaso_MidTerm_A1.pptx lám. 1 con textos nuevos (plantilla de la casa, azul #4236F6, nada en rojo)
 Fuente: S08_Guia_Profesor.md · C.15 #1 · B (19:50–20:01)
 Lámina 1</a:t>
             </a:r>
@@ -429,7 +428,7 @@
             <a:r>
               <a:rPr lang="en-US" dirty="0"/>
               <a:t>Sigue con estas imágenes. KO: (nombre), 김치를 좋아해요? → 네, 좋아해요. / 아니요, 안 좋아해요. · (nombre), 뭘 좋아해요? → 불고기를 좋아해요 (tiene que salir con partícula). Si un alumno nombra algo que te gusta, reacciona 저도요! (input, no se pide ni se evalúa). Si vas atrasada: 4 alumnos en vez de 8.
-Imagen sugerida: Imágenes sin texto (la palabra en 한글 aparece con clic): película, canción, K-drama, deporte, kimchi
+Imagen: incluida (dibujo de la casa).
 Fuente: S08_Guia_Profesor.md · C.15 #9 · C.3 bloque 2 (C) · B.3 (2)
 Lámina 9b</a:t>
             </a:r>
@@ -519,7 +518,7 @@
             <a:r>
               <a:rPr lang="en-US" dirty="0"/>
               <a:t>20:09, 45 s. ES: “En Corea, para 추석, la fiesta de la cosecha, que este año fue a fines de septiembre, y para 설날, el Año Nuevo lunar (el próximo es el 7 de febrero), un regalo clásico es una caja de 사과 o de 배, la pera coreana, con cada fruta envuelta una por una. ¿Y acá? La canasta navideña, el pan de pascua… En diciembre estamos justo en temporada de regalar.” KO a un alumno: (nombre), 사과를 좋아해요? 배를 좋아해요? → 잘했어요! Si vas atrasada, di solo la frase ancla.
-Imagen sugerida: Foto de una caja de 사과 o de 배 con cada fruta envuelta una por una (manzana verde o amarilla, o el 배 dorado; nunca manzana roja)
+Imagen: incluida (dibujo de la casa).
 Fuente: S08_Guia_Profesor.md · C.15 #10 · A.7 · C.3 bloque 2 (cultura) · material §8
 Lámina 10</a:t>
             </a:r>
@@ -1499,7 +1498,6 @@
             <a:r>
               <a:rPr lang="en-US" dirty="0"/>
               <a:t>20:57–20:58. KO: 감사합니다! 안녕히 가세요! 화이팅! Los alumnos: 감사합니다! 안녕히 계세요! con leve inclinación. Captura de galería solo si el grupo acepta (no va a redes sin permiso explícito). Corta la grabación y cierra a las 20:58: a las 21:00 empieza otra clase en la misma cuenta de Zoom. La frase de la lámina está en pasado: se muestra traducida, no se practica.
-Imagen sugerida: Diseño de Repaso_MidTerm_A1.pptx lám. 34 (frase de marca del kit) con el sello del tigre (versión 2, sin marco)
 Fuente: S08_Guia_Profesor.md · C.15 #19 · B (20:57) · D (1 y 11) · reutiliza Repaso_MidTerm_A1.pptx lám. 34
 Lámina 19</a:t>
             </a:r>
@@ -1856,7 +1854,7 @@
             <a:r>
               <a:rPr lang="en-US" dirty="0"/>
               <a:t>20:03–20:05. Dilo primero; el texto aparece con clic después. KO, señalando cada foto: 저는 커피를 정말 좋아해요. 매일 커피를 마셔요. · 그리고 한국 드라마를 좋아해요. · 라면은… 조금 좋아해요 (gesto de más o menos). · 운동은… 안 좋아해요 (cara de pena, con humor). ES: “¿Qué me encanta? ¿Qué me gusta un poco? ¿Qué no me gusta?” (aceptan español o la palabra en coreano). Estos 4 gustos son de ejemplo: van los tuyos.
-Imagen sugerida: 4 fotos de los gustos reales de Kiran (los manda antes del vie 20 nov); provisionalmente: café, K-drama, ramyeon, deporte
+Imagen: incluida (dibujo de la casa).
 Fuente: S08_Guia_Profesor.md · C.15 #3 · C.3 bloque 2 (R)
 Lámina 3</a:t>
             </a:r>
@@ -2391,7 +2389,7 @@
             <a:r>
               <a:rPr lang="en-US" dirty="0"/>
               <a:t>20:07–20:09. KO: 따라 하세요: 김치를 좋아해요? (entonación que sube). Pregunta a 6–8 alumnos, empezando por los últimos del orden de presentaciones: (nombre), 사과를 좋아해요? → 네, (정말) 좋아해요. / 아니요, 안 좋아해요. · 정말 좋아해요? 조금 좋아해요? → 조금 좋아해요. Partícula: “¿termina en 받침?” (no des la respuesta); pronunciación: 다시 한번; bien: 잘했어요!
-Imagen sugerida: Imágenes sin texto (la palabra en 한글 aparece con clic): manzana verde o amarilla (nunca roja ni el emoji de manzana roja), banana, fruta variada, bulgogi, ramyeon
+Imagen: incluida (dibujo de la casa).
 Fuente: S08_Guia_Profesor.md · C.15 #9 · C.3 bloque 2 (C) · C.8
 Lámina 9a</a:t>
             </a:r>
@@ -3446,7 +3444,7 @@
               <a:buNone/>
             </a:pPr>
             <a:r>
-              <a:rPr lang="en-US" sz="4400" b="1" dirty="0">
+              <a:rPr lang="en-US" sz="4100" b="1" dirty="0">
                 <a:solidFill>
                   <a:srgbClr val="FFFFFF"/>
                 </a:solidFill>
@@ -3685,7 +3683,7 @@
       </p:sp>
       <p:pic>
         <p:nvPicPr>
-          <p:cNvPr id="4" name="dibujo_0" descr="C:\Users\Chingu\AppData\Local\Temp\claude\C--Users-Chingu-Desktop-ACADEMIASEULWEB\d4111e1b-5523-44ea-97b2-b1a1d9545b9e\scratchpad\decks\cache\ec9881ed9994.png"/>
+          <p:cNvPr id="4" name="dibujo_0" descr="C:\Users\Chingu\AppData\Local\Temp\claude\C--Users-Chingu-Desktop-ACADEMIASEULWEB\d4111e1b-5523-44ea-97b2-b1a1d9545b9e\scratchpad\decks\cache\img_1a10d3b4eab21023.png"/>
           <p:cNvPicPr>
             <a:picLocks noChangeAspect="1"/>
           </p:cNvPicPr>
@@ -3699,8 +3697,8 @@
         </p:blipFill>
         <p:spPr>
           <a:xfrm>
-            <a:off x="1836191" y="1435608"/>
-            <a:ext cx="969721" cy="969721"/>
+            <a:off x="1766926" y="1435608"/>
+            <a:ext cx="1108253" cy="1108253"/>
           </a:xfrm>
           <a:prstGeom prst="rect">
             <a:avLst/>
@@ -3715,8 +3713,8 @@
         </p:nvSpPr>
         <p:spPr>
           <a:xfrm>
-            <a:off x="548640" y="2423617"/>
-            <a:ext cx="3544824" cy="507949"/>
+            <a:off x="548640" y="2562149"/>
+            <a:ext cx="3544824" cy="461772"/>
           </a:xfrm>
           <a:prstGeom prst="rect">
             <a:avLst/>
@@ -3734,7 +3732,7 @@
               <a:buNone/>
             </a:pPr>
             <a:r>
-              <a:rPr lang="ko-KR" altLang="en-US" sz="3100" b="1" dirty="0">
+              <a:rPr lang="ko-KR" altLang="en-US" sz="2900" b="1" dirty="0">
                 <a:solidFill>
                   <a:srgbClr val="4236F6"/>
                 </a:solidFill>
@@ -3744,7 +3742,7 @@
               </a:rPr>
               <a:t>영화</a:t>
             </a:r>
-            <a:endParaRPr lang="en-US" sz="3100" dirty="0"/>
+            <a:endParaRPr lang="en-US" sz="2900" dirty="0"/>
           </a:p>
         </p:txBody>
       </p:sp>
@@ -3756,8 +3754,8 @@
         </p:nvSpPr>
         <p:spPr>
           <a:xfrm>
-            <a:off x="621792" y="2931566"/>
-            <a:ext cx="3398520" cy="291694"/>
+            <a:off x="621792" y="3023921"/>
+            <a:ext cx="3398520" cy="537667"/>
           </a:xfrm>
           <a:prstGeom prst="rect">
             <a:avLst/>
@@ -3811,8 +3809,8 @@
         </p:blipFill>
         <p:spPr>
           <a:xfrm>
-            <a:off x="3654552" y="3214116"/>
-            <a:ext cx="329184" cy="329184"/>
+            <a:off x="3691128" y="1399032"/>
+            <a:ext cx="310896" cy="310896"/>
           </a:xfrm>
           <a:prstGeom prst="rect">
             <a:avLst/>
@@ -3855,7 +3853,7 @@
       </p:sp>
       <p:pic>
         <p:nvPicPr>
-          <p:cNvPr id="9" name="dibujo_1" descr="C:\Users\Chingu\AppData\Local\Temp\claude\C--Users-Chingu-Desktop-ACADEMIASEULWEB\d4111e1b-5523-44ea-97b2-b1a1d9545b9e\scratchpad\decks\cache\eb85b8eb9e98.png"/>
+          <p:cNvPr id="9" name="dibujo_1" descr="C:\Users\Chingu\AppData\Local\Temp\claude\C--Users-Chingu-Desktop-ACADEMIASEULWEB\d4111e1b-5523-44ea-97b2-b1a1d9545b9e\scratchpad\decks\cache\img_b92768372336df4c.png"/>
           <p:cNvPicPr>
             <a:picLocks noChangeAspect="1"/>
           </p:cNvPicPr>
@@ -3869,8 +3867,8 @@
         </p:blipFill>
         <p:spPr>
           <a:xfrm>
-            <a:off x="5609615" y="1435608"/>
-            <a:ext cx="969721" cy="969721"/>
+            <a:off x="5540350" y="1435608"/>
+            <a:ext cx="1108253" cy="1108253"/>
           </a:xfrm>
           <a:prstGeom prst="rect">
             <a:avLst/>
@@ -3885,8 +3883,8 @@
         </p:nvSpPr>
         <p:spPr>
           <a:xfrm>
-            <a:off x="4322064" y="2423617"/>
-            <a:ext cx="3544824" cy="507949"/>
+            <a:off x="4322064" y="2562149"/>
+            <a:ext cx="3544824" cy="461772"/>
           </a:xfrm>
           <a:prstGeom prst="rect">
             <a:avLst/>
@@ -3904,7 +3902,7 @@
               <a:buNone/>
             </a:pPr>
             <a:r>
-              <a:rPr lang="ko-KR" altLang="en-US" sz="3100" b="1" dirty="0">
+              <a:rPr lang="ko-KR" altLang="en-US" sz="2900" b="1" dirty="0">
                 <a:solidFill>
                   <a:srgbClr val="4236F6"/>
                 </a:solidFill>
@@ -3914,7 +3912,7 @@
               </a:rPr>
               <a:t>노래</a:t>
             </a:r>
-            <a:endParaRPr lang="en-US" sz="3100" dirty="0"/>
+            <a:endParaRPr lang="en-US" sz="2900" dirty="0"/>
           </a:p>
         </p:txBody>
       </p:sp>
@@ -3926,8 +3924,8 @@
         </p:nvSpPr>
         <p:spPr>
           <a:xfrm>
-            <a:off x="4395216" y="2931566"/>
-            <a:ext cx="3398520" cy="291694"/>
+            <a:off x="4395216" y="3023921"/>
+            <a:ext cx="3398520" cy="537667"/>
           </a:xfrm>
           <a:prstGeom prst="rect">
             <a:avLst/>
@@ -3981,8 +3979,8 @@
         </p:blipFill>
         <p:spPr>
           <a:xfrm>
-            <a:off x="7427976" y="3214116"/>
-            <a:ext cx="329184" cy="329184"/>
+            <a:off x="7464552" y="1399032"/>
+            <a:ext cx="310896" cy="310896"/>
           </a:xfrm>
           <a:prstGeom prst="rect">
             <a:avLst/>
@@ -4025,7 +4023,7 @@
       </p:sp>
       <p:pic>
         <p:nvPicPr>
-          <p:cNvPr id="14" name="dibujo_2" descr="C:\Users\Chingu\AppData\Local\Temp\claude\C--Users-Chingu-Desktop-ACADEMIASEULWEB\d4111e1b-5523-44ea-97b2-b1a1d9545b9e\scratchpad\decks\cache\eb939ceb9dbceba788.png"/>
+          <p:cNvPr id="14" name="dibujo_2" descr="C:\Users\Chingu\AppData\Local\Temp\claude\C--Users-Chingu-Desktop-ACADEMIASEULWEB\d4111e1b-5523-44ea-97b2-b1a1d9545b9e\scratchpad\decks\cache\img_fd96af5d4de752db.png"/>
           <p:cNvPicPr>
             <a:picLocks noChangeAspect="1"/>
           </p:cNvPicPr>
@@ -4039,8 +4037,8 @@
         </p:blipFill>
         <p:spPr>
           <a:xfrm>
-            <a:off x="9383039" y="1435608"/>
-            <a:ext cx="969721" cy="969721"/>
+            <a:off x="9313774" y="1435608"/>
+            <a:ext cx="1108253" cy="1108253"/>
           </a:xfrm>
           <a:prstGeom prst="rect">
             <a:avLst/>
@@ -4055,8 +4053,8 @@
         </p:nvSpPr>
         <p:spPr>
           <a:xfrm>
-            <a:off x="8095488" y="2423617"/>
-            <a:ext cx="3544824" cy="507949"/>
+            <a:off x="8095488" y="2562149"/>
+            <a:ext cx="3544824" cy="461772"/>
           </a:xfrm>
           <a:prstGeom prst="rect">
             <a:avLst/>
@@ -4074,7 +4072,7 @@
               <a:buNone/>
             </a:pPr>
             <a:r>
-              <a:rPr lang="ko-KR" altLang="en-US" sz="3100" b="1" dirty="0">
+              <a:rPr lang="ko-KR" altLang="en-US" sz="2900" b="1" dirty="0">
                 <a:solidFill>
                   <a:srgbClr val="4236F6"/>
                 </a:solidFill>
@@ -4084,7 +4082,7 @@
               </a:rPr>
               <a:t>드라마</a:t>
             </a:r>
-            <a:endParaRPr lang="en-US" sz="3100" dirty="0"/>
+            <a:endParaRPr lang="en-US" sz="2900" dirty="0"/>
           </a:p>
         </p:txBody>
       </p:sp>
@@ -4096,8 +4094,8 @@
         </p:nvSpPr>
         <p:spPr>
           <a:xfrm>
-            <a:off x="8168640" y="2931566"/>
-            <a:ext cx="3398520" cy="291694"/>
+            <a:off x="8168640" y="3023921"/>
+            <a:ext cx="3398520" cy="537667"/>
           </a:xfrm>
           <a:prstGeom prst="rect">
             <a:avLst/>
@@ -4151,8 +4149,8 @@
         </p:blipFill>
         <p:spPr>
           <a:xfrm>
-            <a:off x="11201400" y="3214116"/>
-            <a:ext cx="329184" cy="329184"/>
+            <a:off x="11237976" y="1399032"/>
+            <a:ext cx="310896" cy="310896"/>
           </a:xfrm>
           <a:prstGeom prst="rect">
             <a:avLst/>
@@ -4195,7 +4193,7 @@
       </p:sp>
       <p:pic>
         <p:nvPicPr>
-          <p:cNvPr id="19" name="dibujo_3" descr="C:\Users\Chingu\AppData\Local\Temp\claude\C--Users-Chingu-Desktop-ACADEMIASEULWEB\d4111e1b-5523-44ea-97b2-b1a1d9545b9e\scratchpad\decks\cache\ec9ab4eb8f99.png"/>
+          <p:cNvPr id="19" name="dibujo_3" descr="C:\Users\Chingu\AppData\Local\Temp\claude\C--Users-Chingu-Desktop-ACADEMIASEULWEB\d4111e1b-5523-44ea-97b2-b1a1d9545b9e\scratchpad\decks\cache\img_d4d418261acc8ca0.png"/>
           <p:cNvPicPr>
             <a:picLocks noChangeAspect="1"/>
           </p:cNvPicPr>
@@ -4209,8 +4207,8 @@
         </p:blipFill>
         <p:spPr>
           <a:xfrm>
-            <a:off x="1836191" y="3973068"/>
-            <a:ext cx="969721" cy="969721"/>
+            <a:off x="1766926" y="3973068"/>
+            <a:ext cx="1108253" cy="1108253"/>
           </a:xfrm>
           <a:prstGeom prst="rect">
             <a:avLst/>
@@ -4225,8 +4223,8 @@
         </p:nvSpPr>
         <p:spPr>
           <a:xfrm>
-            <a:off x="548640" y="4961077"/>
-            <a:ext cx="3544824" cy="507949"/>
+            <a:off x="548640" y="5099609"/>
+            <a:ext cx="3544824" cy="461772"/>
           </a:xfrm>
           <a:prstGeom prst="rect">
             <a:avLst/>
@@ -4244,7 +4242,7 @@
               <a:buNone/>
             </a:pPr>
             <a:r>
-              <a:rPr lang="ko-KR" altLang="en-US" sz="3100" b="1" dirty="0">
+              <a:rPr lang="ko-KR" altLang="en-US" sz="2900" b="1" dirty="0">
                 <a:solidFill>
                   <a:srgbClr val="4236F6"/>
                 </a:solidFill>
@@ -4254,7 +4252,7 @@
               </a:rPr>
               <a:t>운동</a:t>
             </a:r>
-            <a:endParaRPr lang="en-US" sz="3100" dirty="0"/>
+            <a:endParaRPr lang="en-US" sz="2900" dirty="0"/>
           </a:p>
         </p:txBody>
       </p:sp>
@@ -4266,8 +4264,8 @@
         </p:nvSpPr>
         <p:spPr>
           <a:xfrm>
-            <a:off x="621792" y="5469026"/>
-            <a:ext cx="3398520" cy="291694"/>
+            <a:off x="621792" y="5561381"/>
+            <a:ext cx="3398520" cy="537667"/>
           </a:xfrm>
           <a:prstGeom prst="rect">
             <a:avLst/>
@@ -4321,8 +4319,8 @@
         </p:blipFill>
         <p:spPr>
           <a:xfrm>
-            <a:off x="3654552" y="5751576"/>
-            <a:ext cx="329184" cy="329184"/>
+            <a:off x="3691128" y="3936492"/>
+            <a:ext cx="310896" cy="310896"/>
           </a:xfrm>
           <a:prstGeom prst="rect">
             <a:avLst/>
@@ -4365,7 +4363,7 @@
       </p:sp>
       <p:pic>
         <p:nvPicPr>
-          <p:cNvPr id="24" name="dibujo_4" descr="C:\Users\Chingu\AppData\Local\Temp\claude\C--Users-Chingu-Desktop-ACADEMIASEULWEB\d4111e1b-5523-44ea-97b2-b1a1d9545b9e\scratchpad\decks\cache\eab980ecb998.png"/>
+          <p:cNvPr id="24" name="dibujo_4" descr="C:\Users\Chingu\AppData\Local\Temp\claude\C--Users-Chingu-Desktop-ACADEMIASEULWEB\d4111e1b-5523-44ea-97b2-b1a1d9545b9e\scratchpad\decks\cache\img_8c5392b127bd23e1.png"/>
           <p:cNvPicPr>
             <a:picLocks noChangeAspect="1"/>
           </p:cNvPicPr>
@@ -4379,8 +4377,8 @@
         </p:blipFill>
         <p:spPr>
           <a:xfrm>
-            <a:off x="5609615" y="3973068"/>
-            <a:ext cx="969721" cy="969721"/>
+            <a:off x="5540350" y="3973068"/>
+            <a:ext cx="1108253" cy="1108253"/>
           </a:xfrm>
           <a:prstGeom prst="rect">
             <a:avLst/>
@@ -4395,8 +4393,8 @@
         </p:nvSpPr>
         <p:spPr>
           <a:xfrm>
-            <a:off x="4322064" y="4961077"/>
-            <a:ext cx="3544824" cy="507949"/>
+            <a:off x="4322064" y="5099609"/>
+            <a:ext cx="3544824" cy="461772"/>
           </a:xfrm>
           <a:prstGeom prst="rect">
             <a:avLst/>
@@ -4414,7 +4412,7 @@
               <a:buNone/>
             </a:pPr>
             <a:r>
-              <a:rPr lang="ko-KR" altLang="en-US" sz="3100" b="1" dirty="0">
+              <a:rPr lang="ko-KR" altLang="en-US" sz="2900" b="1" dirty="0">
                 <a:solidFill>
                   <a:srgbClr val="4236F6"/>
                 </a:solidFill>
@@ -4424,7 +4422,7 @@
               </a:rPr>
               <a:t>김치</a:t>
             </a:r>
-            <a:endParaRPr lang="en-US" sz="3100" dirty="0"/>
+            <a:endParaRPr lang="en-US" sz="2900" dirty="0"/>
           </a:p>
         </p:txBody>
       </p:sp>
@@ -4436,8 +4434,8 @@
         </p:nvSpPr>
         <p:spPr>
           <a:xfrm>
-            <a:off x="4395216" y="5469026"/>
-            <a:ext cx="3398520" cy="291694"/>
+            <a:off x="4395216" y="5561381"/>
+            <a:ext cx="3398520" cy="537667"/>
           </a:xfrm>
           <a:prstGeom prst="rect">
             <a:avLst/>
@@ -4491,8 +4489,8 @@
         </p:blipFill>
         <p:spPr>
           <a:xfrm>
-            <a:off x="7427976" y="5751576"/>
-            <a:ext cx="329184" cy="329184"/>
+            <a:off x="7464552" y="3936492"/>
+            <a:ext cx="310896" cy="310896"/>
           </a:xfrm>
           <a:prstGeom prst="rect">
             <a:avLst/>
@@ -4723,15 +4721,39 @@
           </a:p>
         </p:txBody>
       </p:sp>
-      <p:sp>
-        <p:nvSpPr>
-          <p:cNvPr id="5" name="Text 3"/>
+      <p:pic>
+        <p:nvPicPr>
+          <p:cNvPr id="5" name="col_img_0" descr="C:\Users\Chingu\AppData\Local\Temp\claude\C--Users-Chingu-Desktop-ACADEMIASEULWEB\d4111e1b-5523-44ea-97b2-b1a1d9545b9e\scratchpad\decks\cache\img_947ee19d6efaa4fe.png"/>
+          <p:cNvPicPr>
+            <a:picLocks noChangeAspect="1"/>
+          </p:cNvPicPr>
+          <p:nvPr/>
+        </p:nvPicPr>
+        <p:blipFill>
+          <a:blip r:embed="rId3"/>
+          <a:stretch>
+            <a:fillRect/>
+          </a:stretch>
+        </p:blipFill>
+        <p:spPr>
+          <a:xfrm>
+            <a:off x="2163064" y="2103120"/>
+            <a:ext cx="2156968" cy="980440"/>
+          </a:xfrm>
+          <a:prstGeom prst="rect">
+            <a:avLst/>
+          </a:prstGeom>
+        </p:spPr>
+      </p:pic>
+      <p:sp>
+        <p:nvSpPr>
+          <p:cNvPr id="6" name="Text 3"/>
           <p:cNvSpPr txBox="1"/>
           <p:nvPr/>
         </p:nvSpPr>
         <p:spPr>
           <a:xfrm>
-            <a:off x="777240" y="2103120"/>
+            <a:off x="777240" y="3175000"/>
             <a:ext cx="4928616" cy="914400"/>
           </a:xfrm>
           <a:prstGeom prst="rect">
@@ -4785,14 +4807,14 @@
       </p:sp>
       <p:sp>
         <p:nvSpPr>
-          <p:cNvPr id="6" name="lista"/>
+          <p:cNvPr id="7" name="lista"/>
           <p:cNvSpPr txBox="1"/>
           <p:nvPr/>
         </p:nvSpPr>
         <p:spPr>
           <a:xfrm>
-            <a:off x="731520" y="3108960"/>
-            <a:ext cx="5020056" cy="2926080"/>
+            <a:off x="731520" y="4180840"/>
+            <a:ext cx="5020056" cy="1854200"/>
           </a:xfrm>
           <a:prstGeom prst="rect">
             <a:avLst/>
@@ -4915,7 +4937,7 @@
       </p:sp>
       <p:sp>
         <p:nvSpPr>
-          <p:cNvPr id="7" name="col_1"/>
+          <p:cNvPr id="8" name="col_1"/>
           <p:cNvSpPr/>
           <p:nvPr/>
         </p:nvSpPr>
@@ -4942,7 +4964,7 @@
       </p:sp>
       <p:sp>
         <p:nvSpPr>
-          <p:cNvPr id="8" name="Text 6"/>
+          <p:cNvPr id="9" name="Text 6"/>
           <p:cNvSpPr txBox="1"/>
           <p:nvPr/>
         </p:nvSpPr>
@@ -4978,16 +5000,40 @@
           </a:p>
         </p:txBody>
       </p:sp>
-      <p:sp>
-        <p:nvSpPr>
-          <p:cNvPr id="9" name="lista"/>
+      <p:pic>
+        <p:nvPicPr>
+          <p:cNvPr id="10" name="col_img_1" descr="C:\Users\Chingu\AppData\Local\Temp\claude\C--Users-Chingu-Desktop-ACADEMIASEULWEB\d4111e1b-5523-44ea-97b2-b1a1d9545b9e\scratchpad\decks\cache\img_d084206d114151c9.png"/>
+          <p:cNvPicPr>
+            <a:picLocks noChangeAspect="1"/>
+          </p:cNvPicPr>
+          <p:nvPr/>
+        </p:nvPicPr>
+        <p:blipFill>
+          <a:blip r:embed="rId4"/>
+          <a:stretch>
+            <a:fillRect/>
+          </a:stretch>
+        </p:blipFill>
+        <p:spPr>
+          <a:xfrm>
+            <a:off x="7237476" y="2103120"/>
+            <a:ext cx="3419856" cy="1554480"/>
+          </a:xfrm>
+          <a:prstGeom prst="rect">
+            <a:avLst/>
+          </a:prstGeom>
+        </p:spPr>
+      </p:pic>
+      <p:sp>
+        <p:nvSpPr>
+          <p:cNvPr id="11" name="lista"/>
           <p:cNvSpPr txBox="1"/>
           <p:nvPr/>
         </p:nvSpPr>
         <p:spPr>
           <a:xfrm>
-            <a:off x="6437376" y="2103120"/>
-            <a:ext cx="5020056" cy="3931920"/>
+            <a:off x="6437376" y="3749040"/>
+            <a:ext cx="5020056" cy="2286000"/>
           </a:xfrm>
           <a:prstGeom prst="rect">
             <a:avLst/>
@@ -5689,7 +5735,7 @@
         <p:spPr>
           <a:xfrm>
             <a:off x="548640" y="1325880"/>
-            <a:ext cx="11064240" cy="457200"/>
+            <a:ext cx="11091672" cy="457200"/>
           </a:xfrm>
           <a:prstGeom prst="rect">
             <a:avLst/>
@@ -6415,7 +6461,7 @@
         <p:spPr>
           <a:xfrm>
             <a:off x="548640" y="1325880"/>
-            <a:ext cx="11064240" cy="457200"/>
+            <a:ext cx="11091672" cy="457200"/>
           </a:xfrm>
           <a:prstGeom prst="rect">
             <a:avLst/>
@@ -6453,7 +6499,7 @@
           <p:nvPr>
             <p:extLst>
               <p:ext uri="{D42A27DB-BD31-4B8C-83A1-F6EECF244321}">
-                <p14:modId xmlns:p14="http://schemas.microsoft.com/office/powerpoint/2010/main" val="2190191473"/>
+                <p14:modId xmlns:p14="http://schemas.microsoft.com/office/powerpoint/2010/main" val="3782883975"/>
               </p:ext>
             </p:extLst>
           </p:nvPr>
@@ -8469,7 +8515,7 @@
         <p:spPr>
           <a:xfrm>
             <a:off x="548640" y="1325880"/>
-            <a:ext cx="11064240" cy="457200"/>
+            <a:ext cx="11091672" cy="457200"/>
           </a:xfrm>
           <a:prstGeom prst="rect">
             <a:avLst/>
@@ -8507,7 +8553,7 @@
           <p:nvPr>
             <p:extLst>
               <p:ext uri="{D42A27DB-BD31-4B8C-83A1-F6EECF244321}">
-                <p14:modId xmlns:p14="http://schemas.microsoft.com/office/powerpoint/2010/main" val="3757014362"/>
+                <p14:modId xmlns:p14="http://schemas.microsoft.com/office/powerpoint/2010/main" val="3542825739"/>
               </p:ext>
             </p:extLst>
           </p:nvPr>
@@ -9990,7 +10036,7 @@
               <a:buChar char="•"/>
             </a:pPr>
             <a:r>
-              <a:rPr lang="ko-KR" altLang="en-US" sz="2400" dirty="0">
+              <a:rPr lang="ko-KR" altLang="en-US" sz="2800" dirty="0">
                 <a:solidFill>
                   <a:srgbClr val="14142B"/>
                 </a:solidFill>
@@ -10001,14 +10047,14 @@
               <a:t>뭘 좋아해요</a:t>
             </a:r>
             <a:r>
-              <a:rPr lang="en-US" sz="2400" dirty="0">
+              <a:rPr lang="en-US" sz="2800" dirty="0">
                 <a:solidFill>
                   <a:srgbClr val="14142B"/>
                 </a:solidFill>
               </a:rPr>
               <a:t>? — ¿Qué te gusta?</a:t>
             </a:r>
-            <a:endParaRPr lang="en-US" sz="2400" dirty="0"/>
+            <a:endParaRPr lang="en-US" sz="2800" dirty="0"/>
           </a:p>
           <a:p>
             <a:pPr marL="228600" indent="-228600" eaLnBrk="1">
@@ -10019,7 +10065,7 @@
               <a:buChar char="•"/>
             </a:pPr>
             <a:r>
-              <a:rPr lang="ko-KR" altLang="en-US" sz="2400" dirty="0">
+              <a:rPr lang="ko-KR" altLang="en-US" sz="2800" dirty="0">
                 <a:solidFill>
                   <a:srgbClr val="14142B"/>
                 </a:solidFill>
@@ -10030,14 +10076,14 @@
               <a:t>불고기를 정말 좋아해요</a:t>
             </a:r>
             <a:r>
-              <a:rPr lang="en-US" sz="2400" dirty="0">
+              <a:rPr lang="en-US" sz="2800" dirty="0">
                 <a:solidFill>
                   <a:srgbClr val="14142B"/>
                 </a:solidFill>
               </a:rPr>
               <a:t>. — Me encanta el bulgogi.</a:t>
             </a:r>
-            <a:endParaRPr lang="en-US" sz="2400" dirty="0"/>
+            <a:endParaRPr lang="en-US" sz="2800" dirty="0"/>
           </a:p>
           <a:p>
             <a:pPr marL="228600" indent="-228600" eaLnBrk="1">
@@ -10048,7 +10094,7 @@
               <a:buChar char="•"/>
             </a:pPr>
             <a:r>
-              <a:rPr lang="ko-KR" altLang="en-US" sz="2400" dirty="0">
+              <a:rPr lang="ko-KR" altLang="en-US" sz="2800" dirty="0">
                 <a:solidFill>
                   <a:srgbClr val="14142B"/>
                 </a:solidFill>
@@ -10059,7 +10105,7 @@
               <a:t>아니요</a:t>
             </a:r>
             <a:r>
-              <a:rPr lang="en-US" sz="2400" dirty="0">
+              <a:rPr lang="en-US" sz="2800" dirty="0">
                 <a:solidFill>
                   <a:srgbClr val="14142B"/>
                 </a:solidFill>
@@ -10067,7 +10113,7 @@
               <a:t>, </a:t>
             </a:r>
             <a:r>
-              <a:rPr lang="ko-KR" altLang="en-US" sz="2400" dirty="0">
+              <a:rPr lang="ko-KR" altLang="en-US" sz="2800" dirty="0">
                 <a:solidFill>
                   <a:srgbClr val="14142B"/>
                 </a:solidFill>
@@ -10078,14 +10124,14 @@
               <a:t>안 좋아해요</a:t>
             </a:r>
             <a:r>
-              <a:rPr lang="en-US" sz="2400" dirty="0">
+              <a:rPr lang="en-US" sz="2800" dirty="0">
                 <a:solidFill>
                   <a:srgbClr val="14142B"/>
                 </a:solidFill>
               </a:rPr>
               <a:t>. — No, no me gusta.</a:t>
             </a:r>
-            <a:endParaRPr lang="en-US" sz="2400" dirty="0"/>
+            <a:endParaRPr lang="en-US" sz="2800" dirty="0"/>
           </a:p>
         </p:txBody>
       </p:sp>
@@ -10398,8 +10444,8 @@
         </p:nvSpPr>
         <p:spPr>
           <a:xfrm>
-            <a:off x="1463040" y="3657600"/>
-            <a:ext cx="9262872" cy="822960"/>
+            <a:off x="1783080" y="3657600"/>
+            <a:ext cx="8439912" cy="822960"/>
           </a:xfrm>
           <a:prstGeom prst="rect">
             <a:avLst/>
@@ -10611,7 +10657,7 @@
         <p:spPr>
           <a:xfrm>
             <a:off x="548640" y="1325880"/>
-            <a:ext cx="11064240" cy="457200"/>
+            <a:ext cx="11091672" cy="457200"/>
           </a:xfrm>
           <a:prstGeom prst="rect">
             <a:avLst/>
@@ -11336,7 +11382,7 @@
         <p:spPr>
           <a:xfrm>
             <a:off x="548640" y="1325880"/>
-            <a:ext cx="11064240" cy="457200"/>
+            <a:ext cx="11091672" cy="457200"/>
           </a:xfrm>
           <a:prstGeom prst="rect">
             <a:avLst/>
@@ -11374,7 +11420,7 @@
           <p:nvPr>
             <p:extLst>
               <p:ext uri="{D42A27DB-BD31-4B8C-83A1-F6EECF244321}">
-                <p14:modId xmlns:p14="http://schemas.microsoft.com/office/powerpoint/2010/main" val="1728241613"/>
+                <p14:modId xmlns:p14="http://schemas.microsoft.com/office/powerpoint/2010/main" val="1036999741"/>
               </p:ext>
             </p:extLst>
           </p:nvPr>
@@ -12706,7 +12752,7 @@
         <p:spPr>
           <a:xfrm>
             <a:off x="548640" y="1325880"/>
-            <a:ext cx="11064240" cy="457200"/>
+            <a:ext cx="11091672" cy="457200"/>
           </a:xfrm>
           <a:prstGeom prst="rect">
             <a:avLst/>
@@ -12774,7 +12820,7 @@
           <p:nvPr>
             <p:extLst>
               <p:ext uri="{D42A27DB-BD31-4B8C-83A1-F6EECF244321}">
-                <p14:modId xmlns:p14="http://schemas.microsoft.com/office/powerpoint/2010/main" val="4131079843"/>
+                <p14:modId xmlns:p14="http://schemas.microsoft.com/office/powerpoint/2010/main" val="3587077147"/>
               </p:ext>
             </p:extLst>
           </p:nvPr>
@@ -13660,7 +13706,7 @@
                           <a:ea typeface="Malgun Gothic" pitchFamily="34" charset="-122"/>
                           <a:cs typeface="Malgun Gothic" pitchFamily="34" charset="-120"/>
                         </a:rPr>
-                        <a:t>우리 가족은 네 명이에요</a:t>
+                        <a:t>우리 가족은 네 명이에요</a:t>
                       </a:r>
                       <a:r>
                         <a:rPr lang="en-US" sz="1600" dirty="0">
@@ -15656,7 +15702,7 @@
                 <a:ea typeface="Malgun Gothic" pitchFamily="34" charset="-122"/>
                 <a:cs typeface="Malgun Gothic" pitchFamily="34" charset="-120"/>
               </a:rPr>
-              <a:t>우리 가족은 세 명이에요</a:t>
+              <a:t>우리 가족은 세 명이에요</a:t>
             </a:r>
             <a:r>
               <a:rPr lang="en-US" sz="2400" dirty="0">
@@ -16139,7 +16185,7 @@
               <a:buChar char="•"/>
             </a:pPr>
             <a:r>
-              <a:rPr lang="ko-KR" altLang="en-US" sz="2400" dirty="0">
+              <a:rPr lang="ko-KR" altLang="en-US" sz="2800" dirty="0">
                 <a:solidFill>
                   <a:srgbClr val="14142B"/>
                 </a:solidFill>
@@ -16150,7 +16196,7 @@
               <a:t>이 사람은 </a:t>
             </a:r>
             <a:r>
-              <a:rPr lang="en-US" sz="2400" dirty="0">
+              <a:rPr lang="en-US" sz="2800" dirty="0">
                 <a:solidFill>
                   <a:srgbClr val="14142B"/>
                 </a:solidFill>
@@ -16158,7 +16204,7 @@
               <a:t>___</a:t>
             </a:r>
             <a:r>
-              <a:rPr lang="ko-KR" altLang="en-US" sz="2400" dirty="0">
+              <a:rPr lang="ko-KR" altLang="en-US" sz="2800" dirty="0">
                 <a:solidFill>
                   <a:srgbClr val="14142B"/>
                 </a:solidFill>
@@ -16169,7 +16215,7 @@
               <a:t>을</a:t>
             </a:r>
             <a:r>
-              <a:rPr lang="en-US" sz="2400" dirty="0">
+              <a:rPr lang="en-US" sz="2800" dirty="0">
                 <a:solidFill>
                   <a:srgbClr val="14142B"/>
                 </a:solidFill>
@@ -16177,7 +16223,7 @@
               <a:t>/</a:t>
             </a:r>
             <a:r>
-              <a:rPr lang="ko-KR" altLang="en-US" sz="2400" dirty="0">
+              <a:rPr lang="ko-KR" altLang="en-US" sz="2800" dirty="0">
                 <a:solidFill>
                   <a:srgbClr val="14142B"/>
                 </a:solidFill>
@@ -16188,14 +16234,14 @@
               <a:t>를 정말 좋아해요</a:t>
             </a:r>
             <a:r>
-              <a:rPr lang="en-US" sz="2400" dirty="0">
+              <a:rPr lang="en-US" sz="2800" dirty="0">
                 <a:solidFill>
                   <a:srgbClr val="14142B"/>
                 </a:solidFill>
               </a:rPr>
               <a:t>.</a:t>
             </a:r>
-            <a:endParaRPr lang="en-US" sz="2400" dirty="0"/>
+            <a:endParaRPr lang="en-US" sz="2800" dirty="0"/>
           </a:p>
           <a:p>
             <a:pPr marL="228600" indent="-228600" eaLnBrk="1">
@@ -16206,7 +16252,7 @@
               <a:buChar char="•"/>
             </a:pPr>
             <a:r>
-              <a:rPr lang="ko-KR" altLang="en-US" sz="2400" dirty="0">
+              <a:rPr lang="ko-KR" altLang="en-US" sz="2800" dirty="0">
                 <a:solidFill>
                   <a:srgbClr val="14142B"/>
                 </a:solidFill>
@@ -16217,7 +16263,7 @@
               <a:t>___은</a:t>
             </a:r>
             <a:r>
-              <a:rPr lang="en-US" sz="2400" dirty="0">
+              <a:rPr lang="en-US" sz="2800" dirty="0">
                 <a:solidFill>
                   <a:srgbClr val="14142B"/>
                 </a:solidFill>
@@ -16225,7 +16271,7 @@
               <a:t>/</a:t>
             </a:r>
             <a:r>
-              <a:rPr lang="ko-KR" altLang="en-US" sz="2400" dirty="0">
+              <a:rPr lang="ko-KR" altLang="en-US" sz="2800" dirty="0">
                 <a:solidFill>
                   <a:srgbClr val="14142B"/>
                 </a:solidFill>
@@ -16236,14 +16282,14 @@
               <a:t>는 안 좋아해요</a:t>
             </a:r>
             <a:r>
-              <a:rPr lang="en-US" sz="2400" dirty="0">
+              <a:rPr lang="en-US" sz="2800" dirty="0">
                 <a:solidFill>
                   <a:srgbClr val="14142B"/>
                 </a:solidFill>
               </a:rPr>
               <a:t>.</a:t>
             </a:r>
-            <a:endParaRPr lang="en-US" sz="2400" dirty="0"/>
+            <a:endParaRPr lang="en-US" sz="2800" dirty="0"/>
           </a:p>
           <a:p>
             <a:pPr marL="228600" indent="-228600" eaLnBrk="1">
@@ -16254,7 +16300,7 @@
               <a:buChar char="•"/>
             </a:pPr>
             <a:r>
-              <a:rPr lang="ko-KR" altLang="en-US" sz="2400" dirty="0">
+              <a:rPr lang="ko-KR" altLang="en-US" sz="2800" dirty="0">
                 <a:solidFill>
                   <a:srgbClr val="14142B"/>
                 </a:solidFill>
@@ -16265,14 +16311,14 @@
               <a:t>누구예요</a:t>
             </a:r>
             <a:r>
-              <a:rPr lang="en-US" sz="2400" dirty="0">
+              <a:rPr lang="en-US" sz="2800" dirty="0">
                 <a:solidFill>
                   <a:srgbClr val="14142B"/>
                 </a:solidFill>
               </a:rPr>
               <a:t>?</a:t>
             </a:r>
-            <a:endParaRPr lang="en-US" sz="2400" dirty="0"/>
+            <a:endParaRPr lang="en-US" sz="2800" dirty="0"/>
           </a:p>
           <a:p>
             <a:pPr marL="228600" indent="-228600" eaLnBrk="1">
@@ -16283,7 +16329,7 @@
               <a:buChar char="•"/>
             </a:pPr>
             <a:r>
-              <a:rPr lang="ko-KR" altLang="en-US" sz="2400" dirty="0">
+              <a:rPr lang="ko-KR" altLang="en-US" sz="2800" dirty="0">
                 <a:solidFill>
                   <a:srgbClr val="14142B"/>
                 </a:solidFill>
@@ -16294,7 +16340,7 @@
               <a:t>Ej.: 이 사람은 라면을 정말 좋아해요</a:t>
             </a:r>
             <a:r>
-              <a:rPr lang="en-US" sz="2400" dirty="0">
+              <a:rPr lang="en-US" sz="2800" dirty="0">
                 <a:solidFill>
                   <a:srgbClr val="14142B"/>
                 </a:solidFill>
@@ -16302,7 +16348,7 @@
               <a:t>. </a:t>
             </a:r>
             <a:r>
-              <a:rPr lang="ko-KR" altLang="en-US" sz="2400" dirty="0">
+              <a:rPr lang="ko-KR" altLang="en-US" sz="2800" dirty="0">
                 <a:solidFill>
                   <a:srgbClr val="14142B"/>
                 </a:solidFill>
@@ -16313,7 +16359,7 @@
               <a:t>운동은 안 좋아해요</a:t>
             </a:r>
             <a:r>
-              <a:rPr lang="en-US" sz="2400" dirty="0">
+              <a:rPr lang="en-US" sz="2800" dirty="0">
                 <a:solidFill>
                   <a:srgbClr val="14142B"/>
                 </a:solidFill>
@@ -16321,7 +16367,7 @@
               <a:t>. </a:t>
             </a:r>
             <a:r>
-              <a:rPr lang="ko-KR" altLang="en-US" sz="2400" dirty="0">
+              <a:rPr lang="ko-KR" altLang="en-US" sz="2800" dirty="0">
                 <a:solidFill>
                   <a:srgbClr val="14142B"/>
                 </a:solidFill>
@@ -16332,7 +16378,7 @@
               <a:t>누구예요</a:t>
             </a:r>
             <a:r>
-              <a:rPr lang="en-US" sz="2400" dirty="0">
+              <a:rPr lang="en-US" sz="2800" dirty="0">
                 <a:solidFill>
                   <a:srgbClr val="14142B"/>
                 </a:solidFill>
@@ -16340,7 +16386,7 @@
               <a:t>? — </a:t>
             </a:r>
             <a:r>
-              <a:rPr lang="ko-KR" altLang="en-US" sz="2400" dirty="0">
+              <a:rPr lang="ko-KR" altLang="en-US" sz="2800" dirty="0">
                 <a:solidFill>
                   <a:srgbClr val="14142B"/>
                 </a:solidFill>
@@ -16351,14 +16397,14 @@
               <a:t>마리아예요</a:t>
             </a:r>
             <a:r>
-              <a:rPr lang="en-US" sz="2400" dirty="0">
+              <a:rPr lang="en-US" sz="2800" dirty="0">
                 <a:solidFill>
                   <a:srgbClr val="14142B"/>
                 </a:solidFill>
               </a:rPr>
               <a:t>!</a:t>
             </a:r>
-            <a:endParaRPr lang="en-US" sz="2400" dirty="0"/>
+            <a:endParaRPr lang="en-US" sz="2800" dirty="0"/>
           </a:p>
         </p:txBody>
       </p:sp>
@@ -16612,7 +16658,7 @@
         <p:spPr>
           <a:xfrm>
             <a:off x="548640" y="1325880"/>
-            <a:ext cx="11064240" cy="457200"/>
+            <a:ext cx="11091672" cy="457200"/>
           </a:xfrm>
           <a:prstGeom prst="rect">
             <a:avLst/>
@@ -16675,16 +16721,40 @@
           </a:effectLst>
         </p:spPr>
       </p:sp>
-      <p:sp>
-        <p:nvSpPr>
-          <p:cNvPr id="5" name="Text 3"/>
+      <p:pic>
+        <p:nvPicPr>
+          <p:cNvPr id="5" name="dibujo_0" descr="C:\Users\Chingu\AppData\Local\Temp\claude\C--Users-Chingu-Desktop-ACADEMIASEULWEB\d4111e1b-5523-44ea-97b2-b1a1d9545b9e\scratchpad\decks\cache\img_53cb8e9c870e4f7e.png"/>
+          <p:cNvPicPr>
+            <a:picLocks noChangeAspect="1"/>
+          </p:cNvPicPr>
+          <p:nvPr/>
+        </p:nvPicPr>
+        <p:blipFill>
+          <a:blip r:embed="rId3"/>
+          <a:stretch>
+            <a:fillRect/>
+          </a:stretch>
+        </p:blipFill>
+        <p:spPr>
+          <a:xfrm>
+            <a:off x="1042919" y="1984248"/>
+            <a:ext cx="1612910" cy="1612910"/>
+          </a:xfrm>
+          <a:prstGeom prst="rect">
+            <a:avLst/>
+          </a:prstGeom>
+        </p:spPr>
+      </p:pic>
+      <p:sp>
+        <p:nvSpPr>
+          <p:cNvPr id="6" name="Text 3"/>
           <p:cNvSpPr txBox="1"/>
           <p:nvPr/>
         </p:nvSpPr>
         <p:spPr>
           <a:xfrm>
-            <a:off x="548640" y="2499970"/>
-            <a:ext cx="2601468" cy="1461211"/>
+            <a:off x="548640" y="3615446"/>
+            <a:ext cx="2601468" cy="859536"/>
           </a:xfrm>
           <a:prstGeom prst="rect">
             <a:avLst/>
@@ -16702,7 +16772,7 @@
               <a:buNone/>
             </a:pPr>
             <a:r>
-              <a:rPr lang="ko-KR" altLang="en-US" sz="3200" b="1" dirty="0">
+              <a:rPr lang="ko-KR" altLang="en-US" sz="2700" b="1" dirty="0">
                 <a:solidFill>
                   <a:srgbClr val="4236F6"/>
                 </a:solidFill>
@@ -16712,14 +16782,14 @@
               </a:rPr>
               <a:t>커피를 정말</a:t>
             </a:r>
-            <a:endParaRPr lang="en-US" sz="3200" dirty="0"/>
+            <a:endParaRPr lang="en-US" sz="2700" dirty="0"/>
           </a:p>
           <a:p>
             <a:pPr marL="0" indent="0" algn="ctr" eaLnBrk="1">
               <a:buNone/>
             </a:pPr>
             <a:r>
-              <a:rPr lang="ko-KR" altLang="en-US" sz="3200" b="1" dirty="0">
+              <a:rPr lang="ko-KR" altLang="en-US" sz="2700" b="1" dirty="0">
                 <a:solidFill>
                   <a:srgbClr val="4236F6"/>
                 </a:solidFill>
@@ -16730,27 +16800,27 @@
               <a:t>좋아해요</a:t>
             </a:r>
             <a:r>
-              <a:rPr lang="en-US" sz="3200" b="1" dirty="0">
+              <a:rPr lang="en-US" sz="2700" b="1" dirty="0">
                 <a:solidFill>
                   <a:srgbClr val="4236F6"/>
                 </a:solidFill>
               </a:rPr>
               <a:t>.</a:t>
             </a:r>
-            <a:endParaRPr lang="en-US" sz="3200" dirty="0"/>
+            <a:endParaRPr lang="en-US" sz="2700" dirty="0"/>
           </a:p>
         </p:txBody>
       </p:sp>
       <p:sp>
         <p:nvSpPr>
-          <p:cNvPr id="6" name="Text 4"/>
+          <p:cNvPr id="7" name="Text 4"/>
           <p:cNvSpPr txBox="1"/>
           <p:nvPr/>
         </p:nvSpPr>
         <p:spPr>
           <a:xfrm>
-            <a:off x="621792" y="3961181"/>
-            <a:ext cx="2455164" cy="1799539"/>
+            <a:off x="621792" y="4474982"/>
+            <a:ext cx="2455164" cy="1624066"/>
           </a:xfrm>
           <a:prstGeom prst="rect">
             <a:avLst/>
@@ -16781,7 +16851,7 @@
       </p:sp>
       <p:sp>
         <p:nvSpPr>
-          <p:cNvPr id="7" name="card_1"/>
+          <p:cNvPr id="8" name="card_1"/>
           <p:cNvSpPr/>
           <p:nvPr/>
         </p:nvSpPr>
@@ -16813,16 +16883,40 @@
           </a:effectLst>
         </p:spPr>
       </p:sp>
-      <p:sp>
-        <p:nvSpPr>
-          <p:cNvPr id="8" name="Text 6"/>
+      <p:pic>
+        <p:nvPicPr>
+          <p:cNvPr id="9" name="dibujo_1" descr="C:\Users\Chingu\AppData\Local\Temp\claude\C--Users-Chingu-Desktop-ACADEMIASEULWEB\d4111e1b-5523-44ea-97b2-b1a1d9545b9e\scratchpad\decks\cache\img_fd96af5d4de752db.png"/>
+          <p:cNvPicPr>
+            <a:picLocks noChangeAspect="1"/>
+          </p:cNvPicPr>
+          <p:nvPr/>
+        </p:nvPicPr>
+        <p:blipFill>
+          <a:blip r:embed="rId4"/>
+          <a:stretch>
+            <a:fillRect/>
+          </a:stretch>
+        </p:blipFill>
+        <p:spPr>
+          <a:xfrm>
+            <a:off x="3872987" y="1984248"/>
+            <a:ext cx="1612910" cy="1612910"/>
+          </a:xfrm>
+          <a:prstGeom prst="rect">
+            <a:avLst/>
+          </a:prstGeom>
+        </p:spPr>
+      </p:pic>
+      <p:sp>
+        <p:nvSpPr>
+          <p:cNvPr id="10" name="Text 6"/>
           <p:cNvSpPr txBox="1"/>
           <p:nvPr/>
         </p:nvSpPr>
         <p:spPr>
           <a:xfrm>
-            <a:off x="3378708" y="2499970"/>
-            <a:ext cx="2601468" cy="1461211"/>
+            <a:off x="3378708" y="3615446"/>
+            <a:ext cx="2601468" cy="859536"/>
           </a:xfrm>
           <a:prstGeom prst="rect">
             <a:avLst/>
@@ -16881,14 +16975,14 @@
       </p:sp>
       <p:sp>
         <p:nvSpPr>
-          <p:cNvPr id="9" name="Text 7"/>
+          <p:cNvPr id="11" name="Text 7"/>
           <p:cNvSpPr txBox="1"/>
           <p:nvPr/>
         </p:nvSpPr>
         <p:spPr>
           <a:xfrm>
-            <a:off x="3451860" y="3961181"/>
-            <a:ext cx="2455164" cy="1799539"/>
+            <a:off x="3451860" y="4474982"/>
+            <a:ext cx="2455164" cy="1624066"/>
           </a:xfrm>
           <a:prstGeom prst="rect">
             <a:avLst/>
@@ -16919,7 +17013,7 @@
       </p:sp>
       <p:sp>
         <p:nvSpPr>
-          <p:cNvPr id="10" name="card_2"/>
+          <p:cNvPr id="12" name="card_2"/>
           <p:cNvSpPr/>
           <p:nvPr/>
         </p:nvSpPr>
@@ -16951,16 +17045,40 @@
           </a:effectLst>
         </p:spPr>
       </p:sp>
-      <p:sp>
-        <p:nvSpPr>
-          <p:cNvPr id="11" name="Text 9"/>
+      <p:pic>
+        <p:nvPicPr>
+          <p:cNvPr id="13" name="dibujo_2" descr="C:\Users\Chingu\AppData\Local\Temp\claude\C--Users-Chingu-Desktop-ACADEMIASEULWEB\d4111e1b-5523-44ea-97b2-b1a1d9545b9e\scratchpad\decks\cache\img_eeee510b3ed92a5d.png"/>
+          <p:cNvPicPr>
+            <a:picLocks noChangeAspect="1"/>
+          </p:cNvPicPr>
+          <p:nvPr/>
+        </p:nvPicPr>
+        <p:blipFill>
+          <a:blip r:embed="rId5"/>
+          <a:stretch>
+            <a:fillRect/>
+          </a:stretch>
+        </p:blipFill>
+        <p:spPr>
+          <a:xfrm>
+            <a:off x="6703055" y="1984248"/>
+            <a:ext cx="1612910" cy="1612910"/>
+          </a:xfrm>
+          <a:prstGeom prst="rect">
+            <a:avLst/>
+          </a:prstGeom>
+        </p:spPr>
+      </p:pic>
+      <p:sp>
+        <p:nvSpPr>
+          <p:cNvPr id="14" name="Text 9"/>
           <p:cNvSpPr txBox="1"/>
           <p:nvPr/>
         </p:nvSpPr>
         <p:spPr>
           <a:xfrm>
-            <a:off x="6208776" y="2499970"/>
-            <a:ext cx="2601468" cy="1461211"/>
+            <a:off x="6208776" y="3615446"/>
+            <a:ext cx="2601468" cy="859536"/>
           </a:xfrm>
           <a:prstGeom prst="rect">
             <a:avLst/>
@@ -16978,7 +17096,7 @@
               <a:buNone/>
             </a:pPr>
             <a:r>
-              <a:rPr lang="ko-KR" altLang="en-US" sz="3200" b="1" dirty="0">
+              <a:rPr lang="ko-KR" altLang="en-US" sz="2700" b="1" dirty="0">
                 <a:solidFill>
                   <a:srgbClr val="4236F6"/>
                 </a:solidFill>
@@ -16988,14 +17106,14 @@
               </a:rPr>
               <a:t>라면은 조금</a:t>
             </a:r>
-            <a:endParaRPr lang="en-US" sz="3200" dirty="0"/>
+            <a:endParaRPr lang="en-US" sz="2700" dirty="0"/>
           </a:p>
           <a:p>
             <a:pPr marL="0" indent="0" algn="ctr" eaLnBrk="1">
               <a:buNone/>
             </a:pPr>
             <a:r>
-              <a:rPr lang="ko-KR" altLang="en-US" sz="3200" b="1" dirty="0">
+              <a:rPr lang="ko-KR" altLang="en-US" sz="2700" b="1" dirty="0">
                 <a:solidFill>
                   <a:srgbClr val="4236F6"/>
                 </a:solidFill>
@@ -17006,27 +17124,27 @@
               <a:t>좋아해요</a:t>
             </a:r>
             <a:r>
-              <a:rPr lang="en-US" sz="3200" b="1" dirty="0">
+              <a:rPr lang="en-US" sz="2700" b="1" dirty="0">
                 <a:solidFill>
                   <a:srgbClr val="4236F6"/>
                 </a:solidFill>
               </a:rPr>
               <a:t>.</a:t>
             </a:r>
-            <a:endParaRPr lang="en-US" sz="3200" dirty="0"/>
+            <a:endParaRPr lang="en-US" sz="2700" dirty="0"/>
           </a:p>
         </p:txBody>
       </p:sp>
       <p:sp>
         <p:nvSpPr>
-          <p:cNvPr id="12" name="Text 10"/>
+          <p:cNvPr id="15" name="Text 10"/>
           <p:cNvSpPr txBox="1"/>
           <p:nvPr/>
         </p:nvSpPr>
         <p:spPr>
           <a:xfrm>
-            <a:off x="6281928" y="3961181"/>
-            <a:ext cx="2455164" cy="1799539"/>
+            <a:off x="6281928" y="4474982"/>
+            <a:ext cx="2455164" cy="1624066"/>
           </a:xfrm>
           <a:prstGeom prst="rect">
             <a:avLst/>
@@ -17057,7 +17175,7 @@
       </p:sp>
       <p:sp>
         <p:nvSpPr>
-          <p:cNvPr id="13" name="card_3"/>
+          <p:cNvPr id="16" name="card_3"/>
           <p:cNvSpPr/>
           <p:nvPr/>
         </p:nvSpPr>
@@ -17089,16 +17207,40 @@
           </a:effectLst>
         </p:spPr>
       </p:sp>
-      <p:sp>
-        <p:nvSpPr>
-          <p:cNvPr id="14" name="Text 12"/>
+      <p:pic>
+        <p:nvPicPr>
+          <p:cNvPr id="17" name="dibujo_3" descr="C:\Users\Chingu\AppData\Local\Temp\claude\C--Users-Chingu-Desktop-ACADEMIASEULWEB\d4111e1b-5523-44ea-97b2-b1a1d9545b9e\scratchpad\decks\cache\img_d4d418261acc8ca0.png"/>
+          <p:cNvPicPr>
+            <a:picLocks noChangeAspect="1"/>
+          </p:cNvPicPr>
+          <p:nvPr/>
+        </p:nvPicPr>
+        <p:blipFill>
+          <a:blip r:embed="rId6"/>
+          <a:stretch>
+            <a:fillRect/>
+          </a:stretch>
+        </p:blipFill>
+        <p:spPr>
+          <a:xfrm>
+            <a:off x="9533123" y="1984248"/>
+            <a:ext cx="1612910" cy="1612910"/>
+          </a:xfrm>
+          <a:prstGeom prst="rect">
+            <a:avLst/>
+          </a:prstGeom>
+        </p:spPr>
+      </p:pic>
+      <p:sp>
+        <p:nvSpPr>
+          <p:cNvPr id="18" name="Text 12"/>
           <p:cNvSpPr txBox="1"/>
           <p:nvPr/>
         </p:nvSpPr>
         <p:spPr>
           <a:xfrm>
-            <a:off x="9038844" y="2499970"/>
-            <a:ext cx="2601468" cy="1461211"/>
+            <a:off x="9038844" y="3615446"/>
+            <a:ext cx="2601468" cy="859536"/>
           </a:xfrm>
           <a:prstGeom prst="rect">
             <a:avLst/>
@@ -17116,7 +17258,7 @@
               <a:buNone/>
             </a:pPr>
             <a:r>
-              <a:rPr lang="ko-KR" altLang="en-US" sz="3700" b="1" dirty="0">
+              <a:rPr lang="ko-KR" altLang="en-US" sz="2700" b="1" dirty="0">
                 <a:solidFill>
                   <a:srgbClr val="4236F6"/>
                 </a:solidFill>
@@ -17126,14 +17268,14 @@
               </a:rPr>
               <a:t>운동은 안</a:t>
             </a:r>
-            <a:endParaRPr lang="en-US" sz="3700" dirty="0"/>
+            <a:endParaRPr lang="en-US" sz="2700" dirty="0"/>
           </a:p>
           <a:p>
             <a:pPr marL="0" indent="0" algn="ctr" eaLnBrk="1">
               <a:buNone/>
             </a:pPr>
             <a:r>
-              <a:rPr lang="ko-KR" altLang="en-US" sz="3700" b="1" dirty="0">
+              <a:rPr lang="ko-KR" altLang="en-US" sz="2700" b="1" dirty="0">
                 <a:solidFill>
                   <a:srgbClr val="4236F6"/>
                 </a:solidFill>
@@ -17144,27 +17286,27 @@
               <a:t>좋아해요</a:t>
             </a:r>
             <a:r>
-              <a:rPr lang="en-US" sz="3700" b="1" dirty="0">
+              <a:rPr lang="en-US" sz="2700" b="1" dirty="0">
                 <a:solidFill>
                   <a:srgbClr val="4236F6"/>
                 </a:solidFill>
               </a:rPr>
               <a:t>.</a:t>
             </a:r>
-            <a:endParaRPr lang="en-US" sz="3700" dirty="0"/>
+            <a:endParaRPr lang="en-US" sz="2700" dirty="0"/>
           </a:p>
         </p:txBody>
       </p:sp>
       <p:sp>
         <p:nvSpPr>
-          <p:cNvPr id="15" name="Text 13"/>
+          <p:cNvPr id="19" name="Text 13"/>
           <p:cNvSpPr txBox="1"/>
           <p:nvPr/>
         </p:nvSpPr>
         <p:spPr>
           <a:xfrm>
-            <a:off x="9111996" y="3961181"/>
-            <a:ext cx="2455164" cy="1799539"/>
+            <a:off x="9111996" y="4474982"/>
+            <a:ext cx="2455164" cy="1624066"/>
           </a:xfrm>
           <a:prstGeom prst="rect">
             <a:avLst/>
@@ -17326,7 +17468,7 @@
         <p:spPr>
           <a:xfrm>
             <a:off x="548640" y="1325880"/>
-            <a:ext cx="11064240" cy="457200"/>
+            <a:ext cx="11091672" cy="457200"/>
           </a:xfrm>
           <a:prstGeom prst="rect">
             <a:avLst/>
@@ -17951,7 +18093,7 @@
         <p:spPr>
           <a:xfrm>
             <a:off x="548640" y="1325880"/>
-            <a:ext cx="11064240" cy="457200"/>
+            <a:ext cx="11091672" cy="457200"/>
           </a:xfrm>
           <a:prstGeom prst="rect">
             <a:avLst/>
@@ -18645,7 +18787,7 @@
         <p:spPr>
           <a:xfrm>
             <a:off x="548640" y="1325880"/>
-            <a:ext cx="11064240" cy="457200"/>
+            <a:ext cx="11091672" cy="457200"/>
           </a:xfrm>
           <a:prstGeom prst="rect">
             <a:avLst/>
@@ -18732,7 +18874,7 @@
           <p:nvPr>
             <p:extLst>
               <p:ext uri="{D42A27DB-BD31-4B8C-83A1-F6EECF244321}">
-                <p14:modId xmlns:p14="http://schemas.microsoft.com/office/powerpoint/2010/main" val="1082843172"/>
+                <p14:modId xmlns:p14="http://schemas.microsoft.com/office/powerpoint/2010/main" val="2196561509"/>
               </p:ext>
             </p:extLst>
           </p:nvPr>
@@ -19649,7 +19791,7 @@
         <p:spPr>
           <a:xfrm>
             <a:off x="548640" y="1325880"/>
-            <a:ext cx="11064240" cy="457200"/>
+            <a:ext cx="11091672" cy="457200"/>
           </a:xfrm>
           <a:prstGeom prst="rect">
             <a:avLst/>
@@ -19728,7 +19870,7 @@
           <p:nvPr>
             <p:extLst>
               <p:ext uri="{D42A27DB-BD31-4B8C-83A1-F6EECF244321}">
-                <p14:modId xmlns:p14="http://schemas.microsoft.com/office/powerpoint/2010/main" val="2089134169"/>
+                <p14:modId xmlns:p14="http://schemas.microsoft.com/office/powerpoint/2010/main" val="2736892856"/>
               </p:ext>
             </p:extLst>
           </p:nvPr>
@@ -21188,7 +21330,7 @@
         <p:spPr>
           <a:xfrm>
             <a:off x="621792" y="3728923"/>
-            <a:ext cx="2455164" cy="1574597"/>
+            <a:ext cx="2455164" cy="1912925"/>
           </a:xfrm>
           <a:prstGeom prst="rect">
             <a:avLst/>
@@ -21350,7 +21492,7 @@
         <p:spPr>
           <a:xfrm>
             <a:off x="3451860" y="3728923"/>
-            <a:ext cx="2455164" cy="1574597"/>
+            <a:ext cx="2455164" cy="1912925"/>
           </a:xfrm>
           <a:prstGeom prst="rect">
             <a:avLst/>
@@ -21440,7 +21582,7 @@
               <a:buNone/>
             </a:pPr>
             <a:r>
-              <a:rPr lang="ko-KR" altLang="en-US" sz="5400" b="1" dirty="0">
+              <a:rPr lang="ko-KR" altLang="en-US" sz="4200" b="1" dirty="0">
                 <a:solidFill>
                   <a:srgbClr val="4236F6"/>
                 </a:solidFill>
@@ -21450,7 +21592,7 @@
               </a:rPr>
               <a:t>라면을</a:t>
             </a:r>
-            <a:endParaRPr lang="en-US" sz="5400" dirty="0"/>
+            <a:endParaRPr lang="en-US" sz="4200" dirty="0"/>
           </a:p>
         </p:txBody>
       </p:sp>
@@ -21512,7 +21654,7 @@
         <p:spPr>
           <a:xfrm>
             <a:off x="6281928" y="3728923"/>
-            <a:ext cx="2455164" cy="1574597"/>
+            <a:ext cx="2455164" cy="1912925"/>
           </a:xfrm>
           <a:prstGeom prst="rect">
             <a:avLst/>
@@ -21602,7 +21744,7 @@
               <a:buNone/>
             </a:pPr>
             <a:r>
-              <a:rPr lang="ko-KR" altLang="en-US" sz="5400" b="1" dirty="0">
+              <a:rPr lang="ko-KR" altLang="en-US" sz="4200" b="1" dirty="0">
                 <a:solidFill>
                   <a:srgbClr val="4236F6"/>
                 </a:solidFill>
@@ -21612,7 +21754,7 @@
               </a:rPr>
               <a:t>과일을</a:t>
             </a:r>
-            <a:endParaRPr lang="en-US" sz="5400" dirty="0"/>
+            <a:endParaRPr lang="en-US" sz="4200" dirty="0"/>
           </a:p>
         </p:txBody>
       </p:sp>
@@ -21674,7 +21816,7 @@
         <p:spPr>
           <a:xfrm>
             <a:off x="9111996" y="3728923"/>
-            <a:ext cx="2455164" cy="1574597"/>
+            <a:ext cx="2455164" cy="1912925"/>
           </a:xfrm>
           <a:prstGeom prst="rect">
             <a:avLst/>
@@ -21898,7 +22040,7 @@
       </p:sp>
       <p:pic>
         <p:nvPicPr>
-          <p:cNvPr id="4" name="dibujo_0" descr="C:\Users\Chingu\AppData\Local\Temp\claude\C--Users-Chingu-Desktop-ACADEMIASEULWEB\d4111e1b-5523-44ea-97b2-b1a1d9545b9e\scratchpad\decks\cache\ec82aceab3bc.png"/>
+          <p:cNvPr id="4" name="dibujo_0" descr="C:\Users\Chingu\AppData\Local\Temp\claude\C--Users-Chingu-Desktop-ACADEMIASEULWEB\d4111e1b-5523-44ea-97b2-b1a1d9545b9e\scratchpad\decks\cache\img_7121720bd7600c7c.png"/>
           <p:cNvPicPr>
             <a:picLocks noChangeAspect="1"/>
           </p:cNvPicPr>
@@ -21912,8 +22054,8 @@
         </p:blipFill>
         <p:spPr>
           <a:xfrm>
-            <a:off x="1836191" y="1435608"/>
-            <a:ext cx="969721" cy="969721"/>
+            <a:off x="1766926" y="1435608"/>
+            <a:ext cx="1108253" cy="1108253"/>
           </a:xfrm>
           <a:prstGeom prst="rect">
             <a:avLst/>
@@ -21928,8 +22070,8 @@
         </p:nvSpPr>
         <p:spPr>
           <a:xfrm>
-            <a:off x="548640" y="2423617"/>
-            <a:ext cx="3544824" cy="507949"/>
+            <a:off x="548640" y="2562149"/>
+            <a:ext cx="3544824" cy="461772"/>
           </a:xfrm>
           <a:prstGeom prst="rect">
             <a:avLst/>
@@ -21947,7 +22089,7 @@
               <a:buNone/>
             </a:pPr>
             <a:r>
-              <a:rPr lang="ko-KR" altLang="en-US" sz="3100" b="1" dirty="0">
+              <a:rPr lang="ko-KR" altLang="en-US" sz="2900" b="1" dirty="0">
                 <a:solidFill>
                   <a:srgbClr val="4236F6"/>
                 </a:solidFill>
@@ -21957,7 +22099,7 @@
               </a:rPr>
               <a:t>사과</a:t>
             </a:r>
-            <a:endParaRPr lang="en-US" sz="3100" dirty="0"/>
+            <a:endParaRPr lang="en-US" sz="2900" dirty="0"/>
           </a:p>
         </p:txBody>
       </p:sp>
@@ -21969,8 +22111,8 @@
         </p:nvSpPr>
         <p:spPr>
           <a:xfrm>
-            <a:off x="621792" y="2931566"/>
-            <a:ext cx="3398520" cy="291694"/>
+            <a:off x="621792" y="3023921"/>
+            <a:ext cx="3398520" cy="537667"/>
           </a:xfrm>
           <a:prstGeom prst="rect">
             <a:avLst/>
@@ -22024,8 +22166,8 @@
         </p:blipFill>
         <p:spPr>
           <a:xfrm>
-            <a:off x="3654552" y="3214116"/>
-            <a:ext cx="329184" cy="329184"/>
+            <a:off x="3691128" y="1399032"/>
+            <a:ext cx="310896" cy="310896"/>
           </a:xfrm>
           <a:prstGeom prst="rect">
             <a:avLst/>
@@ -22068,7 +22210,7 @@
       </p:sp>
       <p:pic>
         <p:nvPicPr>
-          <p:cNvPr id="9" name="dibujo_1" descr="C:\Users\Chingu\AppData\Local\Temp\claude\C--Users-Chingu-Desktop-ACADEMIASEULWEB\d4111e1b-5523-44ea-97b2-b1a1d9545b9e\scratchpad\decks\cache\ebb094eb8298eb8298.png"/>
+          <p:cNvPr id="9" name="dibujo_1" descr="C:\Users\Chingu\AppData\Local\Temp\claude\C--Users-Chingu-Desktop-ACADEMIASEULWEB\d4111e1b-5523-44ea-97b2-b1a1d9545b9e\scratchpad\decks\cache\img_3e1db1d06bc6bc2d.png"/>
           <p:cNvPicPr>
             <a:picLocks noChangeAspect="1"/>
           </p:cNvPicPr>
@@ -22082,8 +22224,8 @@
         </p:blipFill>
         <p:spPr>
           <a:xfrm>
-            <a:off x="5609615" y="1435608"/>
-            <a:ext cx="969721" cy="969721"/>
+            <a:off x="5540350" y="1435608"/>
+            <a:ext cx="1108253" cy="1108253"/>
           </a:xfrm>
           <a:prstGeom prst="rect">
             <a:avLst/>
@@ -22098,8 +22240,8 @@
         </p:nvSpPr>
         <p:spPr>
           <a:xfrm>
-            <a:off x="4322064" y="2423617"/>
-            <a:ext cx="3544824" cy="507949"/>
+            <a:off x="4322064" y="2562149"/>
+            <a:ext cx="3544824" cy="461772"/>
           </a:xfrm>
           <a:prstGeom prst="rect">
             <a:avLst/>
@@ -22117,7 +22259,7 @@
               <a:buNone/>
             </a:pPr>
             <a:r>
-              <a:rPr lang="ko-KR" altLang="en-US" sz="3100" b="1" dirty="0">
+              <a:rPr lang="ko-KR" altLang="en-US" sz="2900" b="1" dirty="0">
                 <a:solidFill>
                   <a:srgbClr val="4236F6"/>
                 </a:solidFill>
@@ -22127,7 +22269,7 @@
               </a:rPr>
               <a:t>바나나</a:t>
             </a:r>
-            <a:endParaRPr lang="en-US" sz="3100" dirty="0"/>
+            <a:endParaRPr lang="en-US" sz="2900" dirty="0"/>
           </a:p>
         </p:txBody>
       </p:sp>
@@ -22139,8 +22281,8 @@
         </p:nvSpPr>
         <p:spPr>
           <a:xfrm>
-            <a:off x="4395216" y="2931566"/>
-            <a:ext cx="3398520" cy="291694"/>
+            <a:off x="4395216" y="3023921"/>
+            <a:ext cx="3398520" cy="537667"/>
           </a:xfrm>
           <a:prstGeom prst="rect">
             <a:avLst/>
@@ -22194,8 +22336,8 @@
         </p:blipFill>
         <p:spPr>
           <a:xfrm>
-            <a:off x="7427976" y="3214116"/>
-            <a:ext cx="329184" cy="329184"/>
+            <a:off x="7464552" y="1399032"/>
+            <a:ext cx="310896" cy="310896"/>
           </a:xfrm>
           <a:prstGeom prst="rect">
             <a:avLst/>
@@ -22238,7 +22380,7 @@
       </p:sp>
       <p:pic>
         <p:nvPicPr>
-          <p:cNvPr id="14" name="dibujo_2" descr="C:\Users\Chingu\AppData\Local\Temp\claude\C--Users-Chingu-Desktop-ACADEMIASEULWEB\d4111e1b-5523-44ea-97b2-b1a1d9545b9e\scratchpad\decks\cache\eab3bcec9dbc.png"/>
+          <p:cNvPr id="14" name="dibujo_2" descr="C:\Users\Chingu\AppData\Local\Temp\claude\C--Users-Chingu-Desktop-ACADEMIASEULWEB\d4111e1b-5523-44ea-97b2-b1a1d9545b9e\scratchpad\decks\cache\img_1dade9dd1f521f6b.png"/>
           <p:cNvPicPr>
             <a:picLocks noChangeAspect="1"/>
           </p:cNvPicPr>
@@ -22252,8 +22394,8 @@
         </p:blipFill>
         <p:spPr>
           <a:xfrm>
-            <a:off x="9383039" y="1435608"/>
-            <a:ext cx="969721" cy="969721"/>
+            <a:off x="9313774" y="1435608"/>
+            <a:ext cx="1108253" cy="1108253"/>
           </a:xfrm>
           <a:prstGeom prst="rect">
             <a:avLst/>
@@ -22268,8 +22410,8 @@
         </p:nvSpPr>
         <p:spPr>
           <a:xfrm>
-            <a:off x="8095488" y="2423617"/>
-            <a:ext cx="3544824" cy="507949"/>
+            <a:off x="8095488" y="2562149"/>
+            <a:ext cx="3544824" cy="461772"/>
           </a:xfrm>
           <a:prstGeom prst="rect">
             <a:avLst/>
@@ -22287,7 +22429,7 @@
               <a:buNone/>
             </a:pPr>
             <a:r>
-              <a:rPr lang="ko-KR" altLang="en-US" sz="3100" b="1" dirty="0">
+              <a:rPr lang="ko-KR" altLang="en-US" sz="2900" b="1" dirty="0">
                 <a:solidFill>
                   <a:srgbClr val="4236F6"/>
                 </a:solidFill>
@@ -22297,7 +22439,7 @@
               </a:rPr>
               <a:t>과일</a:t>
             </a:r>
-            <a:endParaRPr lang="en-US" sz="3100" dirty="0"/>
+            <a:endParaRPr lang="en-US" sz="2900" dirty="0"/>
           </a:p>
         </p:txBody>
       </p:sp>
@@ -22309,8 +22451,8 @@
         </p:nvSpPr>
         <p:spPr>
           <a:xfrm>
-            <a:off x="8168640" y="2931566"/>
-            <a:ext cx="3398520" cy="291694"/>
+            <a:off x="8168640" y="3023921"/>
+            <a:ext cx="3398520" cy="537667"/>
           </a:xfrm>
           <a:prstGeom prst="rect">
             <a:avLst/>
@@ -22364,8 +22506,8 @@
         </p:blipFill>
         <p:spPr>
           <a:xfrm>
-            <a:off x="11201400" y="3214116"/>
-            <a:ext cx="329184" cy="329184"/>
+            <a:off x="11237976" y="1399032"/>
+            <a:ext cx="310896" cy="310896"/>
           </a:xfrm>
           <a:prstGeom prst="rect">
             <a:avLst/>
@@ -22408,7 +22550,7 @@
       </p:sp>
       <p:pic>
         <p:nvPicPr>
-          <p:cNvPr id="19" name="dibujo_3" descr="C:\Users\Chingu\AppData\Local\Temp\claude\C--Users-Chingu-Desktop-ACADEMIASEULWEB\d4111e1b-5523-44ea-97b2-b1a1d9545b9e\scratchpad\decks\cache\ebb688eab3a0eab8b0.png"/>
+          <p:cNvPr id="19" name="dibujo_3" descr="C:\Users\Chingu\AppData\Local\Temp\claude\C--Users-Chingu-Desktop-ACADEMIASEULWEB\d4111e1b-5523-44ea-97b2-b1a1d9545b9e\scratchpad\decks\cache\img_cd6ceeb7cdf77971.png"/>
           <p:cNvPicPr>
             <a:picLocks noChangeAspect="1"/>
           </p:cNvPicPr>
@@ -22422,8 +22564,8 @@
         </p:blipFill>
         <p:spPr>
           <a:xfrm>
-            <a:off x="1836191" y="3973068"/>
-            <a:ext cx="969721" cy="969721"/>
+            <a:off x="1766926" y="3973068"/>
+            <a:ext cx="1108253" cy="1108253"/>
           </a:xfrm>
           <a:prstGeom prst="rect">
             <a:avLst/>
@@ -22438,8 +22580,8 @@
         </p:nvSpPr>
         <p:spPr>
           <a:xfrm>
-            <a:off x="548640" y="4961077"/>
-            <a:ext cx="3544824" cy="507949"/>
+            <a:off x="548640" y="5099609"/>
+            <a:ext cx="3544824" cy="461772"/>
           </a:xfrm>
           <a:prstGeom prst="rect">
             <a:avLst/>
@@ -22457,7 +22599,7 @@
               <a:buNone/>
             </a:pPr>
             <a:r>
-              <a:rPr lang="ko-KR" altLang="en-US" sz="3100" b="1" dirty="0">
+              <a:rPr lang="ko-KR" altLang="en-US" sz="2900" b="1" dirty="0">
                 <a:solidFill>
                   <a:srgbClr val="4236F6"/>
                 </a:solidFill>
@@ -22467,7 +22609,7 @@
               </a:rPr>
               <a:t>불고기</a:t>
             </a:r>
-            <a:endParaRPr lang="en-US" sz="3100" dirty="0"/>
+            <a:endParaRPr lang="en-US" sz="2900" dirty="0"/>
           </a:p>
         </p:txBody>
       </p:sp>
@@ -22479,8 +22621,8 @@
         </p:nvSpPr>
         <p:spPr>
           <a:xfrm>
-            <a:off x="621792" y="5469026"/>
-            <a:ext cx="3398520" cy="291694"/>
+            <a:off x="621792" y="5561381"/>
+            <a:ext cx="3398520" cy="537667"/>
           </a:xfrm>
           <a:prstGeom prst="rect">
             <a:avLst/>
@@ -22534,8 +22676,8 @@
         </p:blipFill>
         <p:spPr>
           <a:xfrm>
-            <a:off x="3654552" y="5751576"/>
-            <a:ext cx="329184" cy="329184"/>
+            <a:off x="3691128" y="3936492"/>
+            <a:ext cx="310896" cy="310896"/>
           </a:xfrm>
           <a:prstGeom prst="rect">
             <a:avLst/>
@@ -22578,7 +22720,7 @@
       </p:sp>
       <p:pic>
         <p:nvPicPr>
-          <p:cNvPr id="24" name="dibujo_4" descr="C:\Users\Chingu\AppData\Local\Temp\claude\C--Users-Chingu-Desktop-ACADEMIASEULWEB\d4111e1b-5523-44ea-97b2-b1a1d9545b9e\scratchpad\decks\cache\eb9dbceba9b4.png"/>
+          <p:cNvPr id="24" name="dibujo_4" descr="C:\Users\Chingu\AppData\Local\Temp\claude\C--Users-Chingu-Desktop-ACADEMIASEULWEB\d4111e1b-5523-44ea-97b2-b1a1d9545b9e\scratchpad\decks\cache\img_eeee510b3ed92a5d.png"/>
           <p:cNvPicPr>
             <a:picLocks noChangeAspect="1"/>
           </p:cNvPicPr>
@@ -22592,8 +22734,8 @@
         </p:blipFill>
         <p:spPr>
           <a:xfrm>
-            <a:off x="5609615" y="3973068"/>
-            <a:ext cx="969721" cy="969721"/>
+            <a:off x="5540350" y="3973068"/>
+            <a:ext cx="1108253" cy="1108253"/>
           </a:xfrm>
           <a:prstGeom prst="rect">
             <a:avLst/>
@@ -22608,8 +22750,8 @@
         </p:nvSpPr>
         <p:spPr>
           <a:xfrm>
-            <a:off x="4322064" y="4961077"/>
-            <a:ext cx="3544824" cy="507949"/>
+            <a:off x="4322064" y="5099609"/>
+            <a:ext cx="3544824" cy="461772"/>
           </a:xfrm>
           <a:prstGeom prst="rect">
             <a:avLst/>
@@ -22627,7 +22769,7 @@
               <a:buNone/>
             </a:pPr>
             <a:r>
-              <a:rPr lang="ko-KR" altLang="en-US" sz="3100" b="1" dirty="0">
+              <a:rPr lang="ko-KR" altLang="en-US" sz="2900" b="1" dirty="0">
                 <a:solidFill>
                   <a:srgbClr val="4236F6"/>
                 </a:solidFill>
@@ -22637,7 +22779,7 @@
               </a:rPr>
               <a:t>라면</a:t>
             </a:r>
-            <a:endParaRPr lang="en-US" sz="3100" dirty="0"/>
+            <a:endParaRPr lang="en-US" sz="2900" dirty="0"/>
           </a:p>
         </p:txBody>
       </p:sp>
@@ -22649,8 +22791,8 @@
         </p:nvSpPr>
         <p:spPr>
           <a:xfrm>
-            <a:off x="4395216" y="5469026"/>
-            <a:ext cx="3398520" cy="291694"/>
+            <a:off x="4395216" y="5561381"/>
+            <a:ext cx="3398520" cy="537667"/>
           </a:xfrm>
           <a:prstGeom prst="rect">
             <a:avLst/>
@@ -22704,8 +22846,8 @@
         </p:blipFill>
         <p:spPr>
           <a:xfrm>
-            <a:off x="7427976" y="5751576"/>
-            <a:ext cx="329184" cy="329184"/>
+            <a:off x="7464552" y="3936492"/>
+            <a:ext cx="310896" cy="310896"/>
           </a:xfrm>
           <a:prstGeom prst="rect">
             <a:avLst/>

--- a/Curriculo/Fase2_Basico1/decks/Basico1_S08_Kiran.pptx
+++ b/Curriculo/Fase2_Basico1/decks/Basico1_S08_Kiran.pptx
@@ -130,7 +130,7 @@
   <p:extLst>
     <p:ext uri="{521415D9-36F7-43E2-AB2F-B90AF26B5E84}">
       <p14:sectionLst xmlns:p14="http://schemas.microsoft.com/office/powerpoint/2010/main">
-        <p14:section name="Semana 8" id="{1B4E82AB-2ACD-E12D-08AF-A964983EB13F}">
+        <p14:section name="Semana 8" id="{EEAE02E5-D73A-A550-7C0C-7E95D93DF52E}">
           <p14:sldIdLst>
             <p14:sldId id="256"/>
             <p14:sldId id="257"/>
@@ -192,7 +192,7 @@
     </p:spTree>
     <p:extLst>
       <p:ext uri="{BB962C8B-B14F-4D97-AF65-F5344CB8AC3E}">
-        <p14:creationId xmlns:p14="http://schemas.microsoft.com/office/powerpoint/2010/main" val="2525214514"/>
+        <p14:creationId xmlns:p14="http://schemas.microsoft.com/office/powerpoint/2010/main" val="1852772871"/>
       </p:ext>
     </p:extLst>
   </p:cSld>
@@ -338,7 +338,7 @@
           <a:p>
             <a:r>
               <a:rPr lang="en-US" dirty="0"/>
-              <a:t>19:50: entra, reclama anfitrión, deja listas 7 salas automáticas (cuenta regresiva de 15 s), la planilla de rúbrica en el orden sorteado y el cronómetro. 20:00: graba desde el minuto 0 (Basico1-Martes_S08_2026-12-01 o Basico1-Jueves_S08_2026-12-03). Saluda con leve inclinación: 안녕하세요! y espera la respuesta, con cámaras encendidas.
+              <a:t>19:50: entra, reclama anfitrión, deja listas 7 salas automáticas (cuenta regresiva de 15 s), la planilla de rúbrica en el orden sorteado y el cronómetro. 20:00: graba desde el minuto 0 (Basico1-Martes_S08_2026-12-08 o Basico1-Jueves_S08_2026-12-10; el mar 8 es feriado en Chile: Jay confirma si se mantiene). Saluda con leve inclinación: 안녕하세요! y espera la respuesta, con cámaras encendidas.
 Fuente: S08_Guia_Profesor.md · C.15 #1 · B (19:50–20:01)
 Lámina 1</a:t>
             </a:r>
@@ -1230,7 +1230,7 @@
           <a:p>
             <a:r>
               <a:rPr lang="en-US" dirty="0"/>
-              <a:t>20:56. ES: “En enero viene Básico 2 (A1.2): pasado, futuro, la hora, la edad y las fechas. Hoy dices 불고기를 좋아해요; en Básico 2 vas a decir ayer comí bulgogi. El certificado se entrega la semana del 7 de diciembre, y Jay les va a contar de Básico 2.” Las frases de Básico 2 no se practican ni entran en nada: son solo para mirar. Si vas atrasada, una frase y el resto al mensaje post-clase.
+              <a:t>20:56. ES: “En enero viene Básico 2 (A1.2): pasado, futuro, la hora, la edad y las fechas. Hoy dices 불고기를 좋아해요; en Básico 2 vas a decir ayer comí bulgogi. El certificado se entrega la semana del 14 de diciembre, y Jay les va a contar de Básico 2.” Las frases de Básico 2 no se practican ni entran en nada: son solo para mirar. Si vas atrasada, una frase y el resto al mensaje post-clase.
 Fuente: S08_Guia_Profesor.md · C.15 #17 · C.3 bloque 5 (puente) · material §10
 Lámina 17</a:t>
             </a:r>
@@ -1408,7 +1408,7 @@
           <a:p>
             <a:r>
               <a:rPr lang="en-US" dirty="0"/>
-              <a:t>20:56–20:57. ES: “Antes del [fecha], unos 20 minutos: captura final de Progreso y tu audio de 1 minuto con la presentación corregida. Escucha tu audio de la semana 1 y el de hoy: ese es tu antes y después. Anota para ti una cosa que mejoraste y una que quieres trabajar en Básico 2.” Plazo: [propuesta: domingo 6 de diciembre; confirmar con Kiran].
+              <a:t>20:56–20:57. ES: “Antes del [fecha], unos 20 minutos: captura final de Progreso y tu audio de 1 minuto con la presentación corregida. Escucha tu audio de la semana 1 y el de hoy: ese es tu antes y después. Anota para ti una cosa que mejoraste y una que quieres trabajar en Básico 2.” Plazo: [propuesta: domingo 13 de diciembre; confirmar con Kiran].
 Fuente: S08_Guia_Profesor.md · C.15 #18 · A.13 · C.3 bloque 5 · material §9
 Lámina 18</a:t>
             </a:r>
@@ -3530,7 +3530,7 @@
                   <a:srgbClr val="E8B84B"/>
                 </a:solidFill>
               </a:rPr>
-              <a:t>Martes 1 / jueves 3 de diciembre de 2026 · 20:00 (hora de Chile)</a:t>
+              <a:t>Martes 8 [por confirmar] / jueves 10 de diciembre de 2026 · 20:00 (hora de Chile)</a:t>
             </a:r>
             <a:endParaRPr lang="en-US" sz="2200" dirty="0"/>
           </a:p>
@@ -4165,7 +4165,7 @@
         </p:nvSpPr>
         <p:spPr>
           <a:xfrm>
-            <a:off x="548640" y="3863340"/>
+            <a:off x="2435352" y="3863340"/>
             <a:ext cx="3544824" cy="2308860"/>
           </a:xfrm>
           <a:prstGeom prst="roundRect">
@@ -4207,7 +4207,7 @@
         </p:blipFill>
         <p:spPr>
           <a:xfrm>
-            <a:off x="1766926" y="3973068"/>
+            <a:off x="3653638" y="3973068"/>
             <a:ext cx="1108253" cy="1108253"/>
           </a:xfrm>
           <a:prstGeom prst="rect">
@@ -4223,7 +4223,7 @@
         </p:nvSpPr>
         <p:spPr>
           <a:xfrm>
-            <a:off x="548640" y="5099609"/>
+            <a:off x="2435352" y="5099609"/>
             <a:ext cx="3544824" cy="461772"/>
           </a:xfrm>
           <a:prstGeom prst="rect">
@@ -4264,7 +4264,7 @@
         </p:nvSpPr>
         <p:spPr>
           <a:xfrm>
-            <a:off x="621792" y="5561381"/>
+            <a:off x="2508504" y="5561381"/>
             <a:ext cx="3398520" cy="537667"/>
           </a:xfrm>
           <a:prstGeom prst="rect">
@@ -4319,7 +4319,7 @@
         </p:blipFill>
         <p:spPr>
           <a:xfrm>
-            <a:off x="3691128" y="3936492"/>
+            <a:off x="5577840" y="3936492"/>
             <a:ext cx="310896" cy="310896"/>
           </a:xfrm>
           <a:prstGeom prst="rect">
@@ -4335,7 +4335,7 @@
         </p:nvSpPr>
         <p:spPr>
           <a:xfrm>
-            <a:off x="4322064" y="3863340"/>
+            <a:off x="6208776" y="3863340"/>
             <a:ext cx="3544824" cy="2308860"/>
           </a:xfrm>
           <a:prstGeom prst="roundRect">
@@ -4377,7 +4377,7 @@
         </p:blipFill>
         <p:spPr>
           <a:xfrm>
-            <a:off x="5540350" y="3973068"/>
+            <a:off x="7427062" y="3973068"/>
             <a:ext cx="1108253" cy="1108253"/>
           </a:xfrm>
           <a:prstGeom prst="rect">
@@ -4393,7 +4393,7 @@
         </p:nvSpPr>
         <p:spPr>
           <a:xfrm>
-            <a:off x="4322064" y="5099609"/>
+            <a:off x="6208776" y="5099609"/>
             <a:ext cx="3544824" cy="461772"/>
           </a:xfrm>
           <a:prstGeom prst="rect">
@@ -4434,7 +4434,7 @@
         </p:nvSpPr>
         <p:spPr>
           <a:xfrm>
-            <a:off x="4395216" y="5561381"/>
+            <a:off x="6281928" y="5561381"/>
             <a:ext cx="3398520" cy="537667"/>
           </a:xfrm>
           <a:prstGeom prst="rect">
@@ -4489,7 +4489,7 @@
         </p:blipFill>
         <p:spPr>
           <a:xfrm>
-            <a:off x="7464552" y="3936492"/>
+            <a:off x="9351264" y="3936492"/>
             <a:ext cx="310896" cy="310896"/>
           </a:xfrm>
           <a:prstGeom prst="rect">
@@ -6499,7 +6499,7 @@
           <p:nvPr>
             <p:extLst>
               <p:ext uri="{D42A27DB-BD31-4B8C-83A1-F6EECF244321}">
-                <p14:modId xmlns:p14="http://schemas.microsoft.com/office/powerpoint/2010/main" val="3782883975"/>
+                <p14:modId xmlns:p14="http://schemas.microsoft.com/office/powerpoint/2010/main" val="6028992"/>
               </p:ext>
             </p:extLst>
           </p:nvPr>
@@ -8553,7 +8553,7 @@
           <p:nvPr>
             <p:extLst>
               <p:ext uri="{D42A27DB-BD31-4B8C-83A1-F6EECF244321}">
-                <p14:modId xmlns:p14="http://schemas.microsoft.com/office/powerpoint/2010/main" val="3542825739"/>
+                <p14:modId xmlns:p14="http://schemas.microsoft.com/office/powerpoint/2010/main" val="3210309603"/>
               </p:ext>
             </p:extLst>
           </p:nvPr>
@@ -10680,7 +10680,7 @@
                   <a:srgbClr val="4236F6"/>
                 </a:solidFill>
               </a:rPr>
-              <a:t>Pasado · futuro · la hora · la edad · las fechas · enero de 2027 · Certificado: semana del 7 de diciembre</a:t>
+              <a:t>Pasado · futuro · la hora · la edad · las fechas · enero de 2027 · Certificado: semana del 14 de diciembre</a:t>
             </a:r>
             <a:endParaRPr lang="en-US" sz="1800" dirty="0"/>
           </a:p>
@@ -11420,7 +11420,7 @@
           <p:nvPr>
             <p:extLst>
               <p:ext uri="{D42A27DB-BD31-4B8C-83A1-F6EECF244321}">
-                <p14:modId xmlns:p14="http://schemas.microsoft.com/office/powerpoint/2010/main" val="1036999741"/>
+                <p14:modId xmlns:p14="http://schemas.microsoft.com/office/powerpoint/2010/main" val="657113328"/>
               </p:ext>
             </p:extLst>
           </p:nvPr>
@@ -12820,7 +12820,7 @@
           <p:nvPr>
             <p:extLst>
               <p:ext uri="{D42A27DB-BD31-4B8C-83A1-F6EECF244321}">
-                <p14:modId xmlns:p14="http://schemas.microsoft.com/office/powerpoint/2010/main" val="3587077147"/>
+                <p14:modId xmlns:p14="http://schemas.microsoft.com/office/powerpoint/2010/main" val="4111660054"/>
               </p:ext>
             </p:extLst>
           </p:nvPr>
@@ -18874,7 +18874,7 @@
           <p:nvPr>
             <p:extLst>
               <p:ext uri="{D42A27DB-BD31-4B8C-83A1-F6EECF244321}">
-                <p14:modId xmlns:p14="http://schemas.microsoft.com/office/powerpoint/2010/main" val="2196561509"/>
+                <p14:modId xmlns:p14="http://schemas.microsoft.com/office/powerpoint/2010/main" val="1674738522"/>
               </p:ext>
             </p:extLst>
           </p:nvPr>
@@ -19870,7 +19870,7 @@
           <p:nvPr>
             <p:extLst>
               <p:ext uri="{D42A27DB-BD31-4B8C-83A1-F6EECF244321}">
-                <p14:modId xmlns:p14="http://schemas.microsoft.com/office/powerpoint/2010/main" val="2736892856"/>
+                <p14:modId xmlns:p14="http://schemas.microsoft.com/office/powerpoint/2010/main" val="695598875"/>
               </p:ext>
             </p:extLst>
           </p:nvPr>
@@ -22522,7 +22522,7 @@
         </p:nvSpPr>
         <p:spPr>
           <a:xfrm>
-            <a:off x="548640" y="3863340"/>
+            <a:off x="2435352" y="3863340"/>
             <a:ext cx="3544824" cy="2308860"/>
           </a:xfrm>
           <a:prstGeom prst="roundRect">
@@ -22564,7 +22564,7 @@
         </p:blipFill>
         <p:spPr>
           <a:xfrm>
-            <a:off x="1766926" y="3973068"/>
+            <a:off x="3653638" y="3973068"/>
             <a:ext cx="1108253" cy="1108253"/>
           </a:xfrm>
           <a:prstGeom prst="rect">
@@ -22580,7 +22580,7 @@
         </p:nvSpPr>
         <p:spPr>
           <a:xfrm>
-            <a:off x="548640" y="5099609"/>
+            <a:off x="2435352" y="5099609"/>
             <a:ext cx="3544824" cy="461772"/>
           </a:xfrm>
           <a:prstGeom prst="rect">
@@ -22621,7 +22621,7 @@
         </p:nvSpPr>
         <p:spPr>
           <a:xfrm>
-            <a:off x="621792" y="5561381"/>
+            <a:off x="2508504" y="5561381"/>
             <a:ext cx="3398520" cy="537667"/>
           </a:xfrm>
           <a:prstGeom prst="rect">
@@ -22676,7 +22676,7 @@
         </p:blipFill>
         <p:spPr>
           <a:xfrm>
-            <a:off x="3691128" y="3936492"/>
+            <a:off x="5577840" y="3936492"/>
             <a:ext cx="310896" cy="310896"/>
           </a:xfrm>
           <a:prstGeom prst="rect">
@@ -22692,7 +22692,7 @@
         </p:nvSpPr>
         <p:spPr>
           <a:xfrm>
-            <a:off x="4322064" y="3863340"/>
+            <a:off x="6208776" y="3863340"/>
             <a:ext cx="3544824" cy="2308860"/>
           </a:xfrm>
           <a:prstGeom prst="roundRect">
@@ -22734,7 +22734,7 @@
         </p:blipFill>
         <p:spPr>
           <a:xfrm>
-            <a:off x="5540350" y="3973068"/>
+            <a:off x="7427062" y="3973068"/>
             <a:ext cx="1108253" cy="1108253"/>
           </a:xfrm>
           <a:prstGeom prst="rect">
@@ -22750,7 +22750,7 @@
         </p:nvSpPr>
         <p:spPr>
           <a:xfrm>
-            <a:off x="4322064" y="5099609"/>
+            <a:off x="6208776" y="5099609"/>
             <a:ext cx="3544824" cy="461772"/>
           </a:xfrm>
           <a:prstGeom prst="rect">
@@ -22791,7 +22791,7 @@
         </p:nvSpPr>
         <p:spPr>
           <a:xfrm>
-            <a:off x="4395216" y="5561381"/>
+            <a:off x="6281928" y="5561381"/>
             <a:ext cx="3398520" cy="537667"/>
           </a:xfrm>
           <a:prstGeom prst="rect">
@@ -22846,7 +22846,7 @@
         </p:blipFill>
         <p:spPr>
           <a:xfrm>
-            <a:off x="7464552" y="3936492"/>
+            <a:off x="9351264" y="3936492"/>
             <a:ext cx="310896" cy="310896"/>
           </a:xfrm>
           <a:prstGeom prst="rect">
